--- a/cgs_ai/CGS_AI_CORTEX_PIPELINE_v1.pptx
+++ b/cgs_ai/CGS_AI_CORTEX_PIPELINE_v1.pptx
@@ -12224,7 +12224,7 @@
                           <a:latin typeface="Calibri"/>
                           <a:cs typeface="Calibri"/>
                         </a:rPr>
-                        <a:t>Converts a CSV to a styled .xlsx — corporate, plain or minimal. Saves via BytesIO to bypass the Snowflake workspace seek limitation. Returns a result dict.</a:t>
+                        <a:t>Converts a CSV to a styled .xlsx — corporate, corporatev2, plain or minimal. Saves via BytesIO to bypass the Snowflake workspace seek limitation.</a:t>
                       </a:r>
                     </a:p>
                   </a:txBody>
